--- a/assets/pptx/catalog-449.pptx
+++ b/assets/pptx/catalog-449.pptx
@@ -3249,7 +3249,7 @@
                 <a:ea typeface="Ebrima"/>
                 <a:cs typeface="Ebrima"/>
               </a:rPr>
-              <a:t>መሃሪ ነው (2x) ጌታ ይቅር ባይ ነው</a:t>
+              <a:t>መሃሪ ነው 2x ጌታ ይቅር ባይ ነው</a:t>
             </a:r>
           </a:p>
           <a:p>
@@ -3473,7 +3473,7 @@
                 <a:ea typeface="Ebrima"/>
                 <a:cs typeface="Ebrima"/>
               </a:rPr>
-              <a:t>ኢየሱስ ያድናል (6x)</a:t>
+              <a:t>ኢየሱስ ያድናል 6x</a:t>
             </a:r>
           </a:p>
         </p:txBody>
@@ -3921,7 +3921,7 @@
                 <a:ea typeface="Ebrima"/>
                 <a:cs typeface="Ebrima"/>
               </a:rPr>
-              <a:t>መሃሪ ነው (2x) ጌታ መሃሪ ነው</a:t>
+              <a:t>መሃሪ ነው 2x ጌታ መሃሪ ነው</a:t>
             </a:r>
           </a:p>
           <a:p>
@@ -4163,7 +4163,7 @@
                 <a:ea typeface="Ebrima"/>
                 <a:cs typeface="Ebrima"/>
               </a:rPr>
-              <a:t>በርሱ ለታመነው ላመነው ጌታ ታማኝ ነው (3x)</a:t>
+              <a:t>በርሱ ለታመነው ላመነው ጌታ ታማኝ ነው 3x</a:t>
             </a:r>
           </a:p>
           <a:p>
@@ -4181,7 +4181,7 @@
                 <a:ea typeface="Ebrima"/>
                 <a:cs typeface="Ebrima"/>
               </a:rPr>
-              <a:t>እርሱ ታማኝ ነው (4x)</a:t>
+              <a:t>እርሱ ታማኝ ነው 4x</a:t>
             </a:r>
           </a:p>
         </p:txBody>
